--- a/media/resources/files/BaardykAmaldarIntro.pptx
+++ b/media/resources/files/BaardykAmaldarIntro.pptx
@@ -11679,7 +11679,7 @@
             </a:pPr>
             <a:r>
               <a:rPr lang="ru-RU" sz="3200" dirty="0"/>
-              <a:t>Турдуу пикирлер учун ыраазычылык билдиребиз.</a:t>
+              <a:t>Түрдүү пикирлер үчүн ыраазычылык билдиребиз.</a:t>
             </a:r>
           </a:p>
           <a:p>

--- a/media/resources/files/BaardykAmaldarIntro.pptx
+++ b/media/resources/files/BaardykAmaldarIntro.pptx
@@ -1104,7 +1104,7 @@
             </a:r>
             <a:r>
               <a:rPr lang="ky-KG" dirty="0"/>
-              <a:t>Баардык амалдар </a:t>
+              <a:t>Бардык амалдар </a:t>
             </a:r>
             <a:endParaRPr lang="ru-RU" dirty="0"/>
           </a:p>
@@ -1117,7 +1117,7 @@
           <a:p>
             <a:r>
               <a:rPr lang="ru-RU" dirty="0"/>
-              <a:t>Бул ресурс математикалык ыкманын жандуу демонстрацияларын камсыз кылат.</a:t>
+              <a:t>Бул ресурс ыкманы жандуу көрсөтөт.</a:t>
             </a:r>
           </a:p>
           <a:p>
@@ -12998,7 +12998,7 @@
                   <a:srgbClr val="FF0066"/>
                 </a:solidFill>
               </a:rPr>
-              <a:t>кошуу же кемитүүдон мурун </a:t>
+              <a:t>кошуу же кемитүүдөн мурун </a:t>
             </a:r>
             <a:r>
               <a:rPr lang="ru-RU" sz="2400" b="1" dirty="0"/>
